--- a/docs/final/LocalGuide_Presentation.pptx
+++ b/docs/final/LocalGuide_Presentation.pptx
@@ -9208,9 +9208,6 @@
           <a:bodyPr wrap="square" lIns="0" tIns="0" rIns="0" bIns="0" rtlCol="0" anchor="ctr"/>
           <a:lstStyle/>
           <a:p>
-            <a:pPr marL="0" indent="0">
-              <a:buNone/>
-            </a:pPr>
             <a:r>
               <a:rPr lang="en-US" sz="1400" dirty="0">
                 <a:solidFill>
@@ -9218,7 +9215,7 @@
                 </a:solidFill>
                 <a:latin typeface="Calibri" pitchFamily="34" charset="0"/>
               </a:rPr>
-              <a:t>My Bookings  →  Payment  →  Confirmed</a:t>
+              <a:t>My Bookings  →  Pending → Payment  →  Confirmed</a:t>
             </a:r>
           </a:p>
         </p:txBody>
@@ -9393,7 +9390,7 @@
         </p:nvSpPr>
         <p:spPr>
           <a:xfrm>
-            <a:off x="411480" y="3048404"/>
+            <a:off x="411480" y="2738404"/>
             <a:ext cx="4000000" cy="160000"/>
           </a:xfrm>
           <a:prstGeom prst="rect">
@@ -9437,7 +9434,7 @@
         </p:blipFill>
         <p:spPr>
           <a:xfrm>
-            <a:off x="411480" y="3208404"/>
+            <a:off x="411480" y="2898404"/>
             <a:ext cx="4000000" cy="1928393"/>
           </a:xfrm>
           <a:prstGeom prst="rect">
@@ -9826,7 +9823,7 @@
         </p:blipFill>
         <p:spPr>
           <a:xfrm>
-            <a:off x="411480" y="3210000"/>
+            <a:off x="411480" y="3262252"/>
             <a:ext cx="4000000" cy="1215000"/>
           </a:xfrm>
           <a:prstGeom prst="rect">
@@ -9891,7 +9888,7 @@
         </p:blipFill>
         <p:spPr>
           <a:xfrm>
-            <a:off x="4732520" y="3210000"/>
+            <a:off x="4732520" y="3262252"/>
             <a:ext cx="4000000" cy="1577500"/>
           </a:xfrm>
           <a:prstGeom prst="rect">
@@ -12983,9 +12980,6 @@
           <a:bodyPr wrap="square" lIns="0" tIns="0" rIns="0" bIns="0" rtlCol="0" anchor="ctr"/>
           <a:lstStyle/>
           <a:p>
-            <a:pPr marL="0" indent="0">
-              <a:buNone/>
-            </a:pPr>
             <a:r>
               <a:rPr lang="en-US" sz="1300" b="1" dirty="0">
                 <a:solidFill>
@@ -12995,9 +12989,8 @@
                 <a:ea typeface="Calibri" pitchFamily="34" charset="-122"/>
                 <a:cs typeface="Calibri" pitchFamily="34" charset="-120"/>
               </a:rPr>
-              <a:t>Aarti Pandya</a:t>
-            </a:r>
-            <a:endParaRPr lang="en-US" sz="1300" dirty="0"/>
+              <a:t>Sehjalpreet</a:t>
+            </a:r>
           </a:p>
         </p:txBody>
       </p:sp>
@@ -13183,7 +13176,7 @@
         </p:nvSpPr>
         <p:spPr>
           <a:xfrm>
-            <a:off x="539496" y="3328416"/>
+            <a:off x="539496" y="3392424"/>
             <a:ext cx="1152144" cy="731520"/>
           </a:xfrm>
           <a:prstGeom prst="rect">
@@ -13196,9 +13189,6 @@
           <a:bodyPr wrap="square" lIns="0" tIns="0" rIns="0" bIns="0" rtlCol="0" anchor="ctr"/>
           <a:lstStyle/>
           <a:p>
-            <a:pPr marL="0" indent="0">
-              <a:buNone/>
-            </a:pPr>
             <a:r>
               <a:rPr lang="en-US" sz="1300" b="1" dirty="0">
                 <a:solidFill>
@@ -13208,8 +13198,13 @@
                 <a:ea typeface="Calibri" pitchFamily="34" charset="-122"/>
                 <a:cs typeface="Calibri" pitchFamily="34" charset="-120"/>
               </a:rPr>
-              <a:t>Sehjalpreet</a:t>
-            </a:r>
+              <a:t>Dong Zhang</a:t>
+            </a:r>
+          </a:p>
+          <a:p>
+            <a:pPr marL="0" indent="0">
+              <a:buNone/>
+            </a:pPr>
             <a:endParaRPr lang="en-US" sz="1300" dirty="0"/>
           </a:p>
         </p:txBody>
@@ -13396,7 +13391,7 @@
         </p:nvSpPr>
         <p:spPr>
           <a:xfrm>
-            <a:off x="539496" y="4133088"/>
+            <a:off x="539496" y="4155948"/>
             <a:ext cx="1152144" cy="731520"/>
           </a:xfrm>
           <a:prstGeom prst="rect">
@@ -13409,9 +13404,6 @@
           <a:bodyPr wrap="square" lIns="0" tIns="0" rIns="0" bIns="0" rtlCol="0" anchor="ctr"/>
           <a:lstStyle/>
           <a:p>
-            <a:pPr marL="0" indent="0">
-              <a:buNone/>
-            </a:pPr>
             <a:r>
               <a:rPr lang="en-US" sz="1300" b="1" dirty="0">
                 <a:solidFill>
@@ -13421,8 +13413,14 @@
                 <a:ea typeface="Calibri" pitchFamily="34" charset="-122"/>
                 <a:cs typeface="Calibri" pitchFamily="34" charset="-120"/>
               </a:rPr>
-              <a:t>Dong Zhang</a:t>
-            </a:r>
+              <a:t>Aarti Pandya</a:t>
+            </a:r>
+            <a:endParaRPr lang="en-US" sz="1300" dirty="0"/>
+          </a:p>
+          <a:p>
+            <a:pPr marL="0" indent="0">
+              <a:buNone/>
+            </a:pPr>
             <a:endParaRPr lang="en-US" sz="1300" dirty="0"/>
           </a:p>
         </p:txBody>
@@ -20688,7 +20686,7 @@
         </p:nvSpPr>
         <p:spPr>
           <a:xfrm>
-            <a:off x="411480" y="2720083"/>
+            <a:off x="411480" y="2683447"/>
             <a:ext cx="4000000" cy="180000"/>
           </a:xfrm>
           <a:prstGeom prst="rect">
@@ -20712,13 +20710,97 @@
                 <a:latin typeface="Calibri" pitchFamily="34" charset="0"/>
               </a:rPr>
               <a:t>Search Results</a:t>
+            </a:r>
+          </a:p>
+        </p:txBody>
+      </p:sp>
+      <p:sp>
+        <p:nvSpPr>
+          <p:cNvPr id="11" name="Label_admin"/>
+          <p:cNvSpPr/>
+          <p:nvPr/>
+        </p:nvSpPr>
+        <p:spPr>
+          <a:xfrm>
+            <a:off x="4732520" y="3200000"/>
+            <a:ext cx="4000000" cy="180000"/>
+          </a:xfrm>
+          <a:prstGeom prst="rect">
+            <a:avLst/>
+          </a:prstGeom>
+          <a:noFill/>
+          <a:ln/>
+        </p:spPr>
+        <p:txBody>
+          <a:bodyPr wrap="square" lIns="0" tIns="0" rIns="0" bIns="0" rtlCol="0" anchor="ctr"/>
+          <a:lstStyle/>
+          <a:p>
+            <a:pPr marL="0" indent="0">
+              <a:buNone/>
+            </a:pPr>
+            <a:r>
+              <a:rPr lang="en-US" sz="1100" b="1" dirty="0">
+                <a:solidFill>
+                  <a:srgbClr val="4A5568"/>
+                </a:solidFill>
+                <a:latin typeface="Calibri" pitchFamily="34" charset="0"/>
+              </a:rPr>
+              <a:t>Admin Analytics Dashboard</a:t>
+            </a:r>
+          </a:p>
+        </p:txBody>
+      </p:sp>
+      <p:sp>
+        <p:nvSpPr>
+          <p:cNvPr id="13" name="Takeaway"/>
+          <p:cNvSpPr/>
+          <p:nvPr/>
+        </p:nvSpPr>
+        <p:spPr>
+          <a:xfrm>
+            <a:off x="411480" y="4823500"/>
+            <a:ext cx="8321040" cy="280000"/>
+          </a:xfrm>
+          <a:prstGeom prst="rect">
+            <a:avLst/>
+          </a:prstGeom>
+          <a:solidFill>
+            <a:srgbClr val="E8F4F5"/>
+          </a:solidFill>
+          <a:ln w="19050">
+            <a:solidFill>
+              <a:srgbClr val="2A7F85"/>
+            </a:solidFill>
+          </a:ln>
+        </p:spPr>
+        <p:txBody>
+          <a:bodyPr wrap="square" lIns="91440" tIns="45720" rIns="91440" bIns="45720" rtlCol="0" anchor="ctr"/>
+          <a:lstStyle/>
+          <a:p>
+            <a:pPr marL="0" indent="0">
+              <a:buNone/>
+            </a:pPr>
+            <a:r>
+              <a:rPr lang="en-US" sz="1300" b="1" dirty="0">
+                <a:solidFill>
+                  <a:srgbClr val="2A7F85"/>
+                </a:solidFill>
+                <a:latin typeface="Calibri" pitchFamily="34" charset="0"/>
+              </a:rPr>
+              <a:t>✔  Key Takeaway: Every screen shown here is live — fully functional in the browser, not a wireframe.</a:t>
             </a:r>
           </a:p>
         </p:txBody>
       </p:sp>
       <p:pic>
         <p:nvPicPr>
-          <p:cNvPr id="10" name="img_search" descr="Search Results screenshot"/>
+          <p:cNvPr id="15" name="Picture 14">
+            <a:extLst>
+              <a:ext uri="{FF2B5EF4-FFF2-40B4-BE49-F238E27FC236}">
+                <a16:creationId xmlns:a16="http://schemas.microsoft.com/office/drawing/2014/main" id="{B1C9DA09-4952-D048-FB0D-0B330E4409B2}"/>
+              </a:ext>
+            </a:extLst>
+          </p:cNvPr>
           <p:cNvPicPr>
             <a:picLocks noChangeAspect="1"/>
           </p:cNvPicPr>
@@ -20732,58 +20814,23 @@
         </p:blipFill>
         <p:spPr>
           <a:xfrm>
-            <a:off x="411480" y="2900083"/>
-            <a:ext cx="4000000" cy="1653333"/>
-          </a:xfrm>
-          <a:prstGeom prst="rect">
-            <a:avLst/>
-          </a:prstGeom>
-          <a:ln w="19050">
-            <a:solidFill>
-              <a:srgbClr val="CBD5E0"/>
-            </a:solidFill>
-          </a:ln>
+            <a:off x="411480" y="2915730"/>
+            <a:ext cx="3944982" cy="1725000"/>
+          </a:xfrm>
+          <a:prstGeom prst="rect">
+            <a:avLst/>
+          </a:prstGeom>
         </p:spPr>
       </p:pic>
-      <p:sp>
-        <p:nvSpPr>
-          <p:cNvPr id="11" name="Label_admin"/>
-          <p:cNvSpPr/>
-          <p:nvPr/>
-        </p:nvSpPr>
-        <p:spPr>
-          <a:xfrm>
-            <a:off x="4732520" y="3200000"/>
-            <a:ext cx="4000000" cy="180000"/>
-          </a:xfrm>
-          <a:prstGeom prst="rect">
-            <a:avLst/>
-          </a:prstGeom>
-          <a:noFill/>
-          <a:ln/>
-        </p:spPr>
-        <p:txBody>
-          <a:bodyPr wrap="square" lIns="0" tIns="0" rIns="0" bIns="0" rtlCol="0" anchor="ctr"/>
-          <a:lstStyle/>
-          <a:p>
-            <a:pPr marL="0" indent="0">
-              <a:buNone/>
-            </a:pPr>
-            <a:r>
-              <a:rPr lang="en-US" sz="1100" b="1" dirty="0">
-                <a:solidFill>
-                  <a:srgbClr val="4A5568"/>
-                </a:solidFill>
-                <a:latin typeface="Calibri" pitchFamily="34" charset="0"/>
-              </a:rPr>
-              <a:t>Admin Analytics Dashboard</a:t>
-            </a:r>
-          </a:p>
-        </p:txBody>
-      </p:sp>
       <p:pic>
         <p:nvPicPr>
-          <p:cNvPr id="12" name="img_admin" descr="Admin Analytics Dashboard screenshot"/>
+          <p:cNvPr id="17" name="Picture 16">
+            <a:extLst>
+              <a:ext uri="{FF2B5EF4-FFF2-40B4-BE49-F238E27FC236}">
+                <a16:creationId xmlns:a16="http://schemas.microsoft.com/office/drawing/2014/main" id="{C099559D-1D66-761E-43B2-36C6D2F603C0}"/>
+              </a:ext>
+            </a:extLst>
+          </p:cNvPr>
           <p:cNvPicPr>
             <a:picLocks noChangeAspect="1"/>
           </p:cNvPicPr>
@@ -20797,61 +20844,14 @@
         </p:blipFill>
         <p:spPr>
           <a:xfrm>
-            <a:off x="4732520" y="3380000"/>
-            <a:ext cx="4000000" cy="816847"/>
-          </a:xfrm>
-          <a:prstGeom prst="rect">
-            <a:avLst/>
-          </a:prstGeom>
-          <a:ln w="19050">
-            <a:solidFill>
-              <a:srgbClr val="CBD5E0"/>
-            </a:solidFill>
-          </a:ln>
+            <a:off x="4732520" y="3452700"/>
+            <a:ext cx="4258492" cy="1144640"/>
+          </a:xfrm>
+          <a:prstGeom prst="rect">
+            <a:avLst/>
+          </a:prstGeom>
         </p:spPr>
       </p:pic>
-      <p:sp>
-        <p:nvSpPr>
-          <p:cNvPr id="13" name="Takeaway"/>
-          <p:cNvSpPr/>
-          <p:nvPr/>
-        </p:nvSpPr>
-        <p:spPr>
-          <a:xfrm>
-            <a:off x="411480" y="4823500"/>
-            <a:ext cx="8321040" cy="280000"/>
-          </a:xfrm>
-          <a:prstGeom prst="rect">
-            <a:avLst/>
-          </a:prstGeom>
-          <a:solidFill>
-            <a:srgbClr val="E8F4F5"/>
-          </a:solidFill>
-          <a:ln w="19050">
-            <a:solidFill>
-              <a:srgbClr val="2A7F85"/>
-            </a:solidFill>
-          </a:ln>
-        </p:spPr>
-        <p:txBody>
-          <a:bodyPr wrap="square" lIns="91440" tIns="45720" rIns="91440" bIns="45720" rtlCol="0" anchor="ctr"/>
-          <a:lstStyle/>
-          <a:p>
-            <a:pPr marL="0" indent="0">
-              <a:buNone/>
-            </a:pPr>
-            <a:r>
-              <a:rPr lang="en-US" sz="1300" b="1" dirty="0">
-                <a:solidFill>
-                  <a:srgbClr val="2A7F85"/>
-                </a:solidFill>
-                <a:latin typeface="Calibri" pitchFamily="34" charset="0"/>
-              </a:rPr>
-              <a:t>✔  Key Takeaway: Every screen shown here is live — fully functional in the browser, not a wireframe.</a:t>
-            </a:r>
-          </a:p>
-        </p:txBody>
-      </p:sp>
     </p:spTree>
   </p:cSld>
   <p:clrMapOvr>
@@ -20989,7 +20989,7 @@
         <p:spPr>
           <a:xfrm>
             <a:off x="411480" y="1270000"/>
-            <a:ext cx="200000" cy="200000"/>
+            <a:ext cx="300000" cy="200000"/>
           </a:xfrm>
           <a:prstGeom prst="rect">
             <a:avLst/>
@@ -21060,8 +21060,8 @@
         </p:nvSpPr>
         <p:spPr>
           <a:xfrm>
-            <a:off x="6051480" y="1270000"/>
-            <a:ext cx="400000" cy="200000"/>
+            <a:off x="6051479" y="1270000"/>
+            <a:ext cx="995932" cy="200000"/>
           </a:xfrm>
           <a:prstGeom prst="rect">
             <a:avLst/>
@@ -22138,7 +22138,7 @@
               <a:buNone/>
             </a:pPr>
             <a:r>
-              <a:rPr lang="en-US" sz="1400" dirty="0">
+              <a:rPr lang="en-CA" sz="1400" dirty="0">
                 <a:solidFill>
                   <a:srgbClr val="718096"/>
                 </a:solidFill>
@@ -22146,7 +22146,7 @@
                 <a:ea typeface="Calibri" pitchFamily="34" charset="-122"/>
                 <a:cs typeface="Calibri" pitchFamily="34" charset="-120"/>
               </a:rPr>
-              <a:t>Tourist → Payment Simulation → Guide Accept → Confirmed</a:t>
+              <a:t>Tourist → Booking Request → Guide Accepts → Payment Simulation → Confirmed</a:t>
             </a:r>
             <a:endParaRPr lang="en-US" sz="1400" dirty="0"/>
           </a:p>
@@ -22192,8 +22192,8 @@
         </p:nvSpPr>
         <p:spPr>
           <a:xfrm>
-            <a:off x="411480" y="1261872"/>
-            <a:ext cx="1554480" cy="1572768"/>
+            <a:off x="561701" y="1261872"/>
+            <a:ext cx="1103809" cy="1572768"/>
           </a:xfrm>
           <a:prstGeom prst="rect">
             <a:avLst/>
@@ -22224,7 +22224,7 @@
         </p:nvSpPr>
         <p:spPr>
           <a:xfrm>
-            <a:off x="987552" y="1353312"/>
+            <a:off x="930073" y="1353312"/>
             <a:ext cx="420624" cy="420624"/>
           </a:xfrm>
           <a:prstGeom prst="line">
@@ -22256,7 +22256,7 @@
         </p:nvSpPr>
         <p:spPr>
           <a:xfrm>
-            <a:off x="987552" y="1353312"/>
+            <a:off x="918317" y="1353312"/>
             <a:ext cx="420624" cy="420624"/>
           </a:xfrm>
           <a:prstGeom prst="rect">
@@ -22292,7 +22292,7 @@
         </p:nvSpPr>
         <p:spPr>
           <a:xfrm>
-            <a:off x="411480" y="1847088"/>
+            <a:off x="300117" y="1838843"/>
             <a:ext cx="1554480" cy="457200"/>
           </a:xfrm>
           <a:prstGeom prst="rect">
@@ -22348,7 +22348,7 @@
         </p:nvSpPr>
         <p:spPr>
           <a:xfrm>
-            <a:off x="484632" y="2322576"/>
+            <a:off x="462752" y="2314331"/>
             <a:ext cx="1408176" cy="457200"/>
           </a:xfrm>
           <a:prstGeom prst="rect">
@@ -22404,7 +22404,7 @@
         </p:nvSpPr>
         <p:spPr>
           <a:xfrm>
-            <a:off x="1965960" y="1920240"/>
+            <a:off x="1671388" y="1926136"/>
             <a:ext cx="146304" cy="329184"/>
           </a:xfrm>
           <a:prstGeom prst="rect">
@@ -22443,8 +22443,8 @@
         </p:nvSpPr>
         <p:spPr>
           <a:xfrm>
-            <a:off x="2112264" y="1261872"/>
-            <a:ext cx="1554480" cy="1572768"/>
+            <a:off x="1882684" y="1261872"/>
+            <a:ext cx="1105200" cy="1572768"/>
           </a:xfrm>
           <a:prstGeom prst="rect">
             <a:avLst/>
@@ -22475,7 +22475,7 @@
         </p:nvSpPr>
         <p:spPr>
           <a:xfrm>
-            <a:off x="2688336" y="1353312"/>
+            <a:off x="2254648" y="1353312"/>
             <a:ext cx="420624" cy="420624"/>
           </a:xfrm>
           <a:prstGeom prst="line">
@@ -22507,7 +22507,7 @@
         </p:nvSpPr>
         <p:spPr>
           <a:xfrm>
-            <a:off x="2688336" y="1353312"/>
+            <a:off x="2280776" y="1353312"/>
             <a:ext cx="420624" cy="420624"/>
           </a:xfrm>
           <a:prstGeom prst="rect">
@@ -22543,7 +22543,7 @@
         </p:nvSpPr>
         <p:spPr>
           <a:xfrm>
-            <a:off x="2112264" y="1847088"/>
+            <a:off x="1702082" y="1853212"/>
             <a:ext cx="1554480" cy="457200"/>
           </a:xfrm>
           <a:prstGeom prst="rect">
@@ -22599,7 +22599,7 @@
         </p:nvSpPr>
         <p:spPr>
           <a:xfrm>
-            <a:off x="2185416" y="2322576"/>
+            <a:off x="1747810" y="2314787"/>
             <a:ext cx="1408176" cy="457200"/>
           </a:xfrm>
           <a:prstGeom prst="rect">
@@ -22655,7 +22655,7 @@
         </p:nvSpPr>
         <p:spPr>
           <a:xfrm>
-            <a:off x="3666744" y="1920240"/>
+            <a:off x="3036207" y="1920240"/>
             <a:ext cx="146304" cy="329184"/>
           </a:xfrm>
           <a:prstGeom prst="rect">
@@ -22694,8 +22694,8 @@
         </p:nvSpPr>
         <p:spPr>
           <a:xfrm>
-            <a:off x="3813048" y="1261872"/>
-            <a:ext cx="1554480" cy="1572768"/>
+            <a:off x="3238286" y="1272421"/>
+            <a:ext cx="1105200" cy="1572768"/>
           </a:xfrm>
           <a:prstGeom prst="rect">
             <a:avLst/>
@@ -22726,7 +22726,7 @@
         </p:nvSpPr>
         <p:spPr>
           <a:xfrm>
-            <a:off x="4389120" y="1353312"/>
+            <a:off x="3624862" y="1348839"/>
             <a:ext cx="420624" cy="420624"/>
           </a:xfrm>
           <a:prstGeom prst="line">
@@ -22758,7 +22758,7 @@
         </p:nvSpPr>
         <p:spPr>
           <a:xfrm>
-            <a:off x="4389120" y="1353312"/>
+            <a:off x="3606653" y="1345475"/>
             <a:ext cx="420624" cy="420624"/>
           </a:xfrm>
           <a:prstGeom prst="rect">
@@ -22794,7 +22794,7 @@
         </p:nvSpPr>
         <p:spPr>
           <a:xfrm>
-            <a:off x="3813048" y="1847088"/>
+            <a:off x="3036207" y="1857637"/>
             <a:ext cx="1554480" cy="457200"/>
           </a:xfrm>
           <a:prstGeom prst="rect">
@@ -22819,15 +22819,231 @@
                 <a:ea typeface="Calibri" pitchFamily="34" charset="-122"/>
                 <a:cs typeface="Calibri" pitchFamily="34" charset="-120"/>
               </a:rPr>
-              <a:t>Payment</a:t>
+              <a:t>Booking </a:t>
+            </a:r>
+          </a:p>
+          <a:p>
+            <a:pPr marL="0" indent="0" algn="ctr">
+              <a:buNone/>
+            </a:pPr>
+            <a:r>
+              <a:rPr lang="en-US" sz="1300" b="1" dirty="0">
+                <a:solidFill>
+                  <a:srgbClr val="2A7F85"/>
+                </a:solidFill>
+                <a:latin typeface="Calibri" pitchFamily="34" charset="0"/>
+                <a:ea typeface="Calibri" pitchFamily="34" charset="-122"/>
+                <a:cs typeface="Calibri" pitchFamily="34" charset="-120"/>
+              </a:rPr>
+              <a:t>Request</a:t>
             </a:r>
             <a:endParaRPr lang="en-US" sz="1300" dirty="0"/>
           </a:p>
+        </p:txBody>
+      </p:sp>
+      <p:sp>
+        <p:nvSpPr>
+          <p:cNvPr id="21" name="Text 19"/>
+          <p:cNvSpPr/>
+          <p:nvPr/>
+        </p:nvSpPr>
+        <p:spPr>
+          <a:xfrm>
+            <a:off x="3112877" y="2306950"/>
+            <a:ext cx="1408176" cy="457200"/>
+          </a:xfrm>
+          <a:prstGeom prst="rect">
+            <a:avLst/>
+          </a:prstGeom>
+          <a:noFill/>
+          <a:ln/>
+        </p:spPr>
+        <p:txBody>
+          <a:bodyPr wrap="square" lIns="0" tIns="0" rIns="0" bIns="0" rtlCol="0" anchor="ctr"/>
+          <a:lstStyle/>
           <a:p>
             <a:pPr marL="0" indent="0" algn="ctr">
               <a:buNone/>
             </a:pPr>
             <a:r>
+              <a:rPr lang="en-US" sz="1100" dirty="0">
+                <a:solidFill>
+                  <a:srgbClr val="4A5568"/>
+                </a:solidFill>
+                <a:latin typeface="Calibri" pitchFamily="34" charset="0"/>
+                <a:ea typeface="Calibri" pitchFamily="34" charset="-122"/>
+                <a:cs typeface="Calibri" pitchFamily="34" charset="-120"/>
+              </a:rPr>
+              <a:t>Status: CREATED</a:t>
+            </a:r>
+            <a:endParaRPr lang="en-US" sz="1100" dirty="0"/>
+          </a:p>
+        </p:txBody>
+      </p:sp>
+      <p:sp>
+        <p:nvSpPr>
+          <p:cNvPr id="22" name="Text 20"/>
+          <p:cNvSpPr/>
+          <p:nvPr/>
+        </p:nvSpPr>
+        <p:spPr>
+          <a:xfrm>
+            <a:off x="4383009" y="1926136"/>
+            <a:ext cx="146304" cy="329184"/>
+          </a:xfrm>
+          <a:prstGeom prst="rect">
+            <a:avLst/>
+          </a:prstGeom>
+          <a:noFill/>
+          <a:ln/>
+        </p:spPr>
+        <p:txBody>
+          <a:bodyPr wrap="square" lIns="0" tIns="0" rIns="0" bIns="0" rtlCol="0" anchor="ctr"/>
+          <a:lstStyle/>
+          <a:p>
+            <a:pPr marL="0" indent="0" algn="ctr">
+              <a:buNone/>
+            </a:pPr>
+            <a:r>
+              <a:rPr lang="en-US" sz="1600" dirty="0">
+                <a:solidFill>
+                  <a:srgbClr val="2A7F85"/>
+                </a:solidFill>
+                <a:latin typeface="Calibri" pitchFamily="34" charset="0"/>
+                <a:ea typeface="Calibri" pitchFamily="34" charset="-122"/>
+                <a:cs typeface="Calibri" pitchFamily="34" charset="-120"/>
+              </a:rPr>
+              <a:t>→</a:t>
+            </a:r>
+            <a:endParaRPr lang="en-US" sz="1600" dirty="0"/>
+          </a:p>
+        </p:txBody>
+      </p:sp>
+      <p:sp>
+        <p:nvSpPr>
+          <p:cNvPr id="23" name="Shape 21"/>
+          <p:cNvSpPr/>
+          <p:nvPr/>
+        </p:nvSpPr>
+        <p:spPr>
+          <a:xfrm>
+            <a:off x="4630210" y="1268403"/>
+            <a:ext cx="1105200" cy="1572768"/>
+          </a:xfrm>
+          <a:prstGeom prst="rect">
+            <a:avLst/>
+          </a:prstGeom>
+          <a:solidFill>
+            <a:srgbClr val="FFFFFF"/>
+          </a:solidFill>
+          <a:ln w="12700">
+            <a:solidFill>
+              <a:srgbClr val="2A7F85"/>
+            </a:solidFill>
+            <a:prstDash val="solid"/>
+          </a:ln>
+        </p:spPr>
+        <p:txBody>
+          <a:bodyPr/>
+          <a:lstStyle/>
+          <a:p>
+            <a:endParaRPr lang="en-CA"/>
+          </a:p>
+        </p:txBody>
+      </p:sp>
+      <p:sp>
+        <p:nvSpPr>
+          <p:cNvPr id="24" name="Shape 22"/>
+          <p:cNvSpPr/>
+          <p:nvPr/>
+        </p:nvSpPr>
+        <p:spPr>
+          <a:xfrm>
+            <a:off x="4974353" y="1347395"/>
+            <a:ext cx="420624" cy="420624"/>
+          </a:xfrm>
+          <a:prstGeom prst="line">
+            <a:avLst/>
+          </a:prstGeom>
+          <a:solidFill>
+            <a:srgbClr val="2A7F85"/>
+          </a:solidFill>
+          <a:ln w="12700">
+            <a:solidFill>
+              <a:srgbClr val="2A7F85"/>
+            </a:solidFill>
+            <a:prstDash val="solid"/>
+          </a:ln>
+        </p:spPr>
+        <p:txBody>
+          <a:bodyPr/>
+          <a:lstStyle/>
+          <a:p>
+            <a:endParaRPr lang="en-CA"/>
+          </a:p>
+        </p:txBody>
+      </p:sp>
+      <p:sp>
+        <p:nvSpPr>
+          <p:cNvPr id="25" name="Text 23"/>
+          <p:cNvSpPr/>
+          <p:nvPr/>
+        </p:nvSpPr>
+        <p:spPr>
+          <a:xfrm>
+            <a:off x="4974353" y="1347395"/>
+            <a:ext cx="420624" cy="420624"/>
+          </a:xfrm>
+          <a:prstGeom prst="rect">
+            <a:avLst/>
+          </a:prstGeom>
+          <a:noFill/>
+          <a:ln/>
+        </p:spPr>
+        <p:txBody>
+          <a:bodyPr wrap="square" lIns="0" tIns="0" rIns="0" bIns="0" rtlCol="0" anchor="ctr"/>
+          <a:lstStyle/>
+          <a:p>
+            <a:pPr marL="0" indent="0" algn="ctr">
+              <a:buNone/>
+            </a:pPr>
+            <a:r>
+              <a:rPr lang="en-US" sz="2000" b="1" dirty="0">
+                <a:latin typeface="Calibri" pitchFamily="34" charset="0"/>
+                <a:ea typeface="Calibri" pitchFamily="34" charset="-122"/>
+                <a:cs typeface="Calibri" pitchFamily="34" charset="-120"/>
+              </a:rPr>
+              <a:t>4</a:t>
+            </a:r>
+            <a:endParaRPr lang="en-US" sz="2000" dirty="0"/>
+          </a:p>
+        </p:txBody>
+      </p:sp>
+      <p:sp>
+        <p:nvSpPr>
+          <p:cNvPr id="26" name="Text 24"/>
+          <p:cNvSpPr/>
+          <p:nvPr/>
+        </p:nvSpPr>
+        <p:spPr>
+          <a:xfrm>
+            <a:off x="4398272" y="1841171"/>
+            <a:ext cx="1554480" cy="457200"/>
+          </a:xfrm>
+          <a:prstGeom prst="rect">
+            <a:avLst/>
+          </a:prstGeom>
+          <a:noFill/>
+          <a:ln/>
+        </p:spPr>
+        <p:txBody>
+          <a:bodyPr wrap="square" lIns="0" tIns="0" rIns="0" bIns="0" rtlCol="0" anchor="ctr"/>
+          <a:lstStyle/>
+          <a:p>
+            <a:pPr marL="0" indent="0" algn="ctr">
+              <a:buNone/>
+            </a:pPr>
+            <a:r>
               <a:rPr lang="en-US" sz="1300" b="1" dirty="0">
                 <a:solidFill>
                   <a:srgbClr val="2A7F85"/>
@@ -22836,6 +23052,267 @@
                 <a:ea typeface="Calibri" pitchFamily="34" charset="-122"/>
                 <a:cs typeface="Calibri" pitchFamily="34" charset="-120"/>
               </a:rPr>
+              <a:t>Guide</a:t>
+            </a:r>
+            <a:endParaRPr lang="en-US" sz="1300" dirty="0"/>
+          </a:p>
+          <a:p>
+            <a:pPr marL="0" indent="0" algn="ctr">
+              <a:buNone/>
+            </a:pPr>
+            <a:r>
+              <a:rPr lang="en-US" sz="1300" b="1" dirty="0">
+                <a:solidFill>
+                  <a:srgbClr val="2A7F85"/>
+                </a:solidFill>
+                <a:latin typeface="Calibri" pitchFamily="34" charset="0"/>
+                <a:ea typeface="Calibri" pitchFamily="34" charset="-122"/>
+                <a:cs typeface="Calibri" pitchFamily="34" charset="-120"/>
+              </a:rPr>
+              <a:t>Accepts</a:t>
+            </a:r>
+            <a:endParaRPr lang="en-US" sz="1300" dirty="0"/>
+          </a:p>
+        </p:txBody>
+      </p:sp>
+      <p:sp>
+        <p:nvSpPr>
+          <p:cNvPr id="27" name="Text 25"/>
+          <p:cNvSpPr/>
+          <p:nvPr/>
+        </p:nvSpPr>
+        <p:spPr>
+          <a:xfrm>
+            <a:off x="4479035" y="2304952"/>
+            <a:ext cx="1408176" cy="457200"/>
+          </a:xfrm>
+          <a:prstGeom prst="rect">
+            <a:avLst/>
+          </a:prstGeom>
+          <a:noFill/>
+          <a:ln/>
+        </p:spPr>
+        <p:txBody>
+          <a:bodyPr wrap="square" lIns="0" tIns="0" rIns="0" bIns="0" rtlCol="0" anchor="ctr"/>
+          <a:lstStyle/>
+          <a:p>
+            <a:pPr marL="0" indent="0" algn="ctr">
+              <a:buNone/>
+            </a:pPr>
+            <a:r>
+              <a:rPr lang="en-US" sz="1100" dirty="0">
+                <a:solidFill>
+                  <a:srgbClr val="4A5568"/>
+                </a:solidFill>
+                <a:latin typeface="Calibri" pitchFamily="34" charset="0"/>
+                <a:ea typeface="Calibri" pitchFamily="34" charset="-122"/>
+                <a:cs typeface="Calibri" pitchFamily="34" charset="-120"/>
+              </a:rPr>
+              <a:t>CREATED → </a:t>
+            </a:r>
+            <a:r>
+              <a:rPr lang="en-US" sz="1000" dirty="0">
+                <a:solidFill>
+                  <a:srgbClr val="4A5568"/>
+                </a:solidFill>
+                <a:latin typeface="Calibri" pitchFamily="34" charset="0"/>
+                <a:ea typeface="Calibri" pitchFamily="34" charset="-122"/>
+                <a:cs typeface="Calibri" pitchFamily="34" charset="-120"/>
+              </a:rPr>
+              <a:t>PENDING_PAYMENT</a:t>
+            </a:r>
+            <a:endParaRPr lang="en-US" sz="1100" dirty="0"/>
+          </a:p>
+        </p:txBody>
+      </p:sp>
+      <p:sp>
+        <p:nvSpPr>
+          <p:cNvPr id="28" name="Text 26"/>
+          <p:cNvSpPr/>
+          <p:nvPr/>
+        </p:nvSpPr>
+        <p:spPr>
+          <a:xfrm>
+            <a:off x="5786690" y="1920240"/>
+            <a:ext cx="146304" cy="329184"/>
+          </a:xfrm>
+          <a:prstGeom prst="rect">
+            <a:avLst/>
+          </a:prstGeom>
+          <a:noFill/>
+          <a:ln/>
+        </p:spPr>
+        <p:txBody>
+          <a:bodyPr wrap="square" lIns="0" tIns="0" rIns="0" bIns="0" rtlCol="0" anchor="ctr"/>
+          <a:lstStyle/>
+          <a:p>
+            <a:pPr marL="0" indent="0" algn="ctr">
+              <a:buNone/>
+            </a:pPr>
+            <a:r>
+              <a:rPr lang="en-US" sz="1600" dirty="0">
+                <a:solidFill>
+                  <a:srgbClr val="2A7F85"/>
+                </a:solidFill>
+                <a:latin typeface="Calibri" pitchFamily="34" charset="0"/>
+                <a:ea typeface="Calibri" pitchFamily="34" charset="-122"/>
+                <a:cs typeface="Calibri" pitchFamily="34" charset="-120"/>
+              </a:rPr>
+              <a:t>→</a:t>
+            </a:r>
+            <a:endParaRPr lang="en-US" sz="1600" dirty="0"/>
+          </a:p>
+        </p:txBody>
+      </p:sp>
+      <p:sp>
+        <p:nvSpPr>
+          <p:cNvPr id="29" name="Shape 27"/>
+          <p:cNvSpPr/>
+          <p:nvPr/>
+        </p:nvSpPr>
+        <p:spPr>
+          <a:xfrm>
+            <a:off x="6029173" y="1275715"/>
+            <a:ext cx="1105200" cy="1572768"/>
+          </a:xfrm>
+          <a:prstGeom prst="rect">
+            <a:avLst/>
+          </a:prstGeom>
+          <a:solidFill>
+            <a:srgbClr val="E8F4F5"/>
+          </a:solidFill>
+          <a:ln w="12700">
+            <a:solidFill>
+              <a:srgbClr val="2A7F85"/>
+            </a:solidFill>
+            <a:prstDash val="solid"/>
+          </a:ln>
+        </p:spPr>
+        <p:txBody>
+          <a:bodyPr/>
+          <a:lstStyle/>
+          <a:p>
+            <a:endParaRPr lang="en-CA"/>
+          </a:p>
+        </p:txBody>
+      </p:sp>
+      <p:sp>
+        <p:nvSpPr>
+          <p:cNvPr id="30" name="Shape 28"/>
+          <p:cNvSpPr/>
+          <p:nvPr/>
+        </p:nvSpPr>
+        <p:spPr>
+          <a:xfrm>
+            <a:off x="6310520" y="1340814"/>
+            <a:ext cx="420624" cy="420624"/>
+          </a:xfrm>
+          <a:prstGeom prst="line">
+            <a:avLst/>
+          </a:prstGeom>
+          <a:solidFill>
+            <a:srgbClr val="2A7F85"/>
+          </a:solidFill>
+          <a:ln w="12700">
+            <a:solidFill>
+              <a:srgbClr val="2A7F85"/>
+            </a:solidFill>
+            <a:prstDash val="solid"/>
+          </a:ln>
+        </p:spPr>
+        <p:txBody>
+          <a:bodyPr/>
+          <a:lstStyle/>
+          <a:p>
+            <a:endParaRPr lang="en-CA"/>
+          </a:p>
+        </p:txBody>
+      </p:sp>
+      <p:sp>
+        <p:nvSpPr>
+          <p:cNvPr id="31" name="Text 29"/>
+          <p:cNvSpPr/>
+          <p:nvPr/>
+        </p:nvSpPr>
+        <p:spPr>
+          <a:xfrm>
+            <a:off x="6310520" y="1348701"/>
+            <a:ext cx="420624" cy="420624"/>
+          </a:xfrm>
+          <a:prstGeom prst="rect">
+            <a:avLst/>
+          </a:prstGeom>
+          <a:noFill/>
+          <a:ln/>
+        </p:spPr>
+        <p:txBody>
+          <a:bodyPr wrap="square" lIns="0" tIns="0" rIns="0" bIns="0" rtlCol="0" anchor="ctr"/>
+          <a:lstStyle/>
+          <a:p>
+            <a:pPr marL="0" indent="0" algn="ctr">
+              <a:buNone/>
+            </a:pPr>
+            <a:r>
+              <a:rPr lang="en-US" sz="2000" b="1" dirty="0">
+                <a:latin typeface="Calibri" pitchFamily="34" charset="0"/>
+                <a:ea typeface="Calibri" pitchFamily="34" charset="-122"/>
+                <a:cs typeface="Calibri" pitchFamily="34" charset="-120"/>
+              </a:rPr>
+              <a:t>5</a:t>
+            </a:r>
+            <a:endParaRPr lang="en-US" sz="2000" dirty="0"/>
+          </a:p>
+        </p:txBody>
+      </p:sp>
+      <p:sp>
+        <p:nvSpPr>
+          <p:cNvPr id="32" name="Text 30"/>
+          <p:cNvSpPr/>
+          <p:nvPr/>
+        </p:nvSpPr>
+        <p:spPr>
+          <a:xfrm>
+            <a:off x="5810357" y="1835557"/>
+            <a:ext cx="1554480" cy="457200"/>
+          </a:xfrm>
+          <a:prstGeom prst="rect">
+            <a:avLst/>
+          </a:prstGeom>
+          <a:noFill/>
+          <a:ln/>
+        </p:spPr>
+        <p:txBody>
+          <a:bodyPr wrap="square" lIns="0" tIns="0" rIns="0" bIns="0" rtlCol="0" anchor="ctr"/>
+          <a:lstStyle/>
+          <a:p>
+            <a:pPr marL="0" indent="0" algn="ctr">
+              <a:buNone/>
+            </a:pPr>
+            <a:r>
+              <a:rPr lang="en-US" sz="1300" b="1" dirty="0">
+                <a:solidFill>
+                  <a:srgbClr val="2A7F85"/>
+                </a:solidFill>
+                <a:latin typeface="Calibri" pitchFamily="34" charset="0"/>
+                <a:ea typeface="Calibri" pitchFamily="34" charset="-122"/>
+                <a:cs typeface="Calibri" pitchFamily="34" charset="-120"/>
+              </a:rPr>
+              <a:t>Payment </a:t>
+            </a:r>
+          </a:p>
+          <a:p>
+            <a:pPr marL="0" indent="0" algn="ctr">
+              <a:buNone/>
+            </a:pPr>
+            <a:r>
+              <a:rPr lang="en-US" sz="1300" b="1" dirty="0">
+                <a:solidFill>
+                  <a:srgbClr val="2A7F85"/>
+                </a:solidFill>
+                <a:latin typeface="Calibri" pitchFamily="34" charset="0"/>
+                <a:ea typeface="Calibri" pitchFamily="34" charset="-122"/>
+                <a:cs typeface="Calibri" pitchFamily="34" charset="-120"/>
+              </a:rPr>
               <a:t>Simulation</a:t>
             </a:r>
             <a:endParaRPr lang="en-US" sz="1300" dirty="0"/>
@@ -22844,13 +23321,13 @@
       </p:sp>
       <p:sp>
         <p:nvSpPr>
-          <p:cNvPr id="21" name="Text 19"/>
-          <p:cNvSpPr/>
-          <p:nvPr/>
-        </p:nvSpPr>
-        <p:spPr>
-          <a:xfrm>
-            <a:off x="3886200" y="2322576"/>
+          <p:cNvPr id="33" name="Text 31"/>
+          <p:cNvSpPr/>
+          <p:nvPr/>
+        </p:nvSpPr>
+        <p:spPr>
+          <a:xfrm>
+            <a:off x="5842045" y="2337356"/>
             <a:ext cx="1408176" cy="457200"/>
           </a:xfrm>
           <a:prstGeom prst="rect">
@@ -22875,9 +23352,8 @@
                 <a:ea typeface="Calibri" pitchFamily="34" charset="-122"/>
                 <a:cs typeface="Calibri" pitchFamily="34" charset="-120"/>
               </a:rPr>
-              <a:t>PaymentGatewayPort</a:t>
-            </a:r>
-            <a:endParaRPr lang="en-US" sz="1100" dirty="0"/>
+              <a:t>Status: </a:t>
+            </a:r>
           </a:p>
           <a:p>
             <a:pPr marL="0" indent="0" algn="ctr">
@@ -22892,509 +23368,7 @@
                 <a:ea typeface="Calibri" pitchFamily="34" charset="-122"/>
                 <a:cs typeface="Calibri" pitchFamily="34" charset="-120"/>
               </a:rPr>
-              <a:t>stub webhook</a:t>
-            </a:r>
-            <a:endParaRPr lang="en-US" sz="1100" dirty="0"/>
-          </a:p>
-        </p:txBody>
-      </p:sp>
-      <p:sp>
-        <p:nvSpPr>
-          <p:cNvPr id="22" name="Text 20"/>
-          <p:cNvSpPr/>
-          <p:nvPr/>
-        </p:nvSpPr>
-        <p:spPr>
-          <a:xfrm>
-            <a:off x="5367528" y="1920240"/>
-            <a:ext cx="146304" cy="329184"/>
-          </a:xfrm>
-          <a:prstGeom prst="rect">
-            <a:avLst/>
-          </a:prstGeom>
-          <a:noFill/>
-          <a:ln/>
-        </p:spPr>
-        <p:txBody>
-          <a:bodyPr wrap="square" lIns="0" tIns="0" rIns="0" bIns="0" rtlCol="0" anchor="ctr"/>
-          <a:lstStyle/>
-          <a:p>
-            <a:pPr marL="0" indent="0" algn="ctr">
-              <a:buNone/>
-            </a:pPr>
-            <a:r>
-              <a:rPr lang="en-US" sz="1600" dirty="0">
-                <a:solidFill>
-                  <a:srgbClr val="2A7F85"/>
-                </a:solidFill>
-                <a:latin typeface="Calibri" pitchFamily="34" charset="0"/>
-                <a:ea typeface="Calibri" pitchFamily="34" charset="-122"/>
-                <a:cs typeface="Calibri" pitchFamily="34" charset="-120"/>
-              </a:rPr>
-              <a:t>→</a:t>
-            </a:r>
-            <a:endParaRPr lang="en-US" sz="1600" dirty="0"/>
-          </a:p>
-        </p:txBody>
-      </p:sp>
-      <p:sp>
-        <p:nvSpPr>
-          <p:cNvPr id="23" name="Shape 21"/>
-          <p:cNvSpPr/>
-          <p:nvPr/>
-        </p:nvSpPr>
-        <p:spPr>
-          <a:xfrm>
-            <a:off x="5513832" y="1261872"/>
-            <a:ext cx="1554480" cy="1572768"/>
-          </a:xfrm>
-          <a:prstGeom prst="rect">
-            <a:avLst/>
-          </a:prstGeom>
-          <a:solidFill>
-            <a:srgbClr val="FFFFFF"/>
-          </a:solidFill>
-          <a:ln w="12700">
-            <a:solidFill>
-              <a:srgbClr val="2A7F85"/>
-            </a:solidFill>
-            <a:prstDash val="solid"/>
-          </a:ln>
-        </p:spPr>
-        <p:txBody>
-          <a:bodyPr/>
-          <a:lstStyle/>
-          <a:p>
-            <a:endParaRPr lang="en-CA"/>
-          </a:p>
-        </p:txBody>
-      </p:sp>
-      <p:sp>
-        <p:nvSpPr>
-          <p:cNvPr id="24" name="Shape 22"/>
-          <p:cNvSpPr/>
-          <p:nvPr/>
-        </p:nvSpPr>
-        <p:spPr>
-          <a:xfrm>
-            <a:off x="6089904" y="1353312"/>
-            <a:ext cx="420624" cy="420624"/>
-          </a:xfrm>
-          <a:prstGeom prst="line">
-            <a:avLst/>
-          </a:prstGeom>
-          <a:solidFill>
-            <a:srgbClr val="2A7F85"/>
-          </a:solidFill>
-          <a:ln w="12700">
-            <a:solidFill>
-              <a:srgbClr val="2A7F85"/>
-            </a:solidFill>
-            <a:prstDash val="solid"/>
-          </a:ln>
-        </p:spPr>
-        <p:txBody>
-          <a:bodyPr/>
-          <a:lstStyle/>
-          <a:p>
-            <a:endParaRPr lang="en-CA"/>
-          </a:p>
-        </p:txBody>
-      </p:sp>
-      <p:sp>
-        <p:nvSpPr>
-          <p:cNvPr id="25" name="Text 23"/>
-          <p:cNvSpPr/>
-          <p:nvPr/>
-        </p:nvSpPr>
-        <p:spPr>
-          <a:xfrm>
-            <a:off x="6089904" y="1353312"/>
-            <a:ext cx="420624" cy="420624"/>
-          </a:xfrm>
-          <a:prstGeom prst="rect">
-            <a:avLst/>
-          </a:prstGeom>
-          <a:noFill/>
-          <a:ln/>
-        </p:spPr>
-        <p:txBody>
-          <a:bodyPr wrap="square" lIns="0" tIns="0" rIns="0" bIns="0" rtlCol="0" anchor="ctr"/>
-          <a:lstStyle/>
-          <a:p>
-            <a:pPr marL="0" indent="0" algn="ctr">
-              <a:buNone/>
-            </a:pPr>
-            <a:r>
-              <a:rPr lang="en-US" sz="2000" b="1" dirty="0">
-                <a:latin typeface="Calibri" pitchFamily="34" charset="0"/>
-                <a:ea typeface="Calibri" pitchFamily="34" charset="-122"/>
-                <a:cs typeface="Calibri" pitchFamily="34" charset="-120"/>
-              </a:rPr>
-              <a:t>4</a:t>
-            </a:r>
-            <a:endParaRPr lang="en-US" sz="2000" dirty="0"/>
-          </a:p>
-        </p:txBody>
-      </p:sp>
-      <p:sp>
-        <p:nvSpPr>
-          <p:cNvPr id="26" name="Text 24"/>
-          <p:cNvSpPr/>
-          <p:nvPr/>
-        </p:nvSpPr>
-        <p:spPr>
-          <a:xfrm>
-            <a:off x="5513832" y="1847088"/>
-            <a:ext cx="1554480" cy="457200"/>
-          </a:xfrm>
-          <a:prstGeom prst="rect">
-            <a:avLst/>
-          </a:prstGeom>
-          <a:noFill/>
-          <a:ln/>
-        </p:spPr>
-        <p:txBody>
-          <a:bodyPr wrap="square" lIns="0" tIns="0" rIns="0" bIns="0" rtlCol="0" anchor="ctr"/>
-          <a:lstStyle/>
-          <a:p>
-            <a:pPr marL="0" indent="0" algn="ctr">
-              <a:buNone/>
-            </a:pPr>
-            <a:r>
-              <a:rPr lang="en-US" sz="1300" b="1" dirty="0">
-                <a:solidFill>
-                  <a:srgbClr val="2A7F85"/>
-                </a:solidFill>
-                <a:latin typeface="Calibri" pitchFamily="34" charset="0"/>
-                <a:ea typeface="Calibri" pitchFamily="34" charset="-122"/>
-                <a:cs typeface="Calibri" pitchFamily="34" charset="-120"/>
-              </a:rPr>
-              <a:t>Guide</a:t>
-            </a:r>
-            <a:endParaRPr lang="en-US" sz="1300" dirty="0"/>
-          </a:p>
-          <a:p>
-            <a:pPr marL="0" indent="0" algn="ctr">
-              <a:buNone/>
-            </a:pPr>
-            <a:r>
-              <a:rPr lang="en-US" sz="1300" b="1" dirty="0">
-                <a:solidFill>
-                  <a:srgbClr val="2A7F85"/>
-                </a:solidFill>
-                <a:latin typeface="Calibri" pitchFamily="34" charset="0"/>
-                <a:ea typeface="Calibri" pitchFamily="34" charset="-122"/>
-                <a:cs typeface="Calibri" pitchFamily="34" charset="-120"/>
-              </a:rPr>
-              <a:t>Accepts</a:t>
-            </a:r>
-            <a:endParaRPr lang="en-US" sz="1300" dirty="0"/>
-          </a:p>
-        </p:txBody>
-      </p:sp>
-      <p:sp>
-        <p:nvSpPr>
-          <p:cNvPr id="27" name="Text 25"/>
-          <p:cNvSpPr/>
-          <p:nvPr/>
-        </p:nvSpPr>
-        <p:spPr>
-          <a:xfrm>
-            <a:off x="5586984" y="2322576"/>
-            <a:ext cx="1408176" cy="457200"/>
-          </a:xfrm>
-          <a:prstGeom prst="rect">
-            <a:avLst/>
-          </a:prstGeom>
-          <a:noFill/>
-          <a:ln/>
-        </p:spPr>
-        <p:txBody>
-          <a:bodyPr wrap="square" lIns="0" tIns="0" rIns="0" bIns="0" rtlCol="0" anchor="ctr"/>
-          <a:lstStyle/>
-          <a:p>
-            <a:pPr marL="0" indent="0" algn="ctr">
-              <a:buNone/>
-            </a:pPr>
-            <a:r>
-              <a:rPr lang="en-US" sz="1100" dirty="0">
-                <a:solidFill>
-                  <a:srgbClr val="4A5568"/>
-                </a:solidFill>
-                <a:latin typeface="Calibri" pitchFamily="34" charset="0"/>
-                <a:ea typeface="Calibri" pitchFamily="34" charset="-122"/>
-                <a:cs typeface="Calibri" pitchFamily="34" charset="-120"/>
-              </a:rPr>
-              <a:t>PENDING</a:t>
-            </a:r>
-            <a:endParaRPr lang="en-US" sz="1100" dirty="0"/>
-          </a:p>
-          <a:p>
-            <a:pPr marL="0" indent="0" algn="ctr">
-              <a:buNone/>
-            </a:pPr>
-            <a:r>
-              <a:rPr lang="en-US" sz="1100" dirty="0">
-                <a:solidFill>
-                  <a:srgbClr val="4A5568"/>
-                </a:solidFill>
-                <a:latin typeface="Calibri" pitchFamily="34" charset="0"/>
-                <a:ea typeface="Calibri" pitchFamily="34" charset="-122"/>
-                <a:cs typeface="Calibri" pitchFamily="34" charset="-120"/>
-              </a:rPr>
-              <a:t>→ CONFIRMED</a:t>
-            </a:r>
-            <a:endParaRPr lang="en-US" sz="1100" dirty="0"/>
-          </a:p>
-        </p:txBody>
-      </p:sp>
-      <p:sp>
-        <p:nvSpPr>
-          <p:cNvPr id="28" name="Text 26"/>
-          <p:cNvSpPr/>
-          <p:nvPr/>
-        </p:nvSpPr>
-        <p:spPr>
-          <a:xfrm>
-            <a:off x="7068312" y="1920240"/>
-            <a:ext cx="146304" cy="329184"/>
-          </a:xfrm>
-          <a:prstGeom prst="rect">
-            <a:avLst/>
-          </a:prstGeom>
-          <a:noFill/>
-          <a:ln/>
-        </p:spPr>
-        <p:txBody>
-          <a:bodyPr wrap="square" lIns="0" tIns="0" rIns="0" bIns="0" rtlCol="0" anchor="ctr"/>
-          <a:lstStyle/>
-          <a:p>
-            <a:pPr marL="0" indent="0" algn="ctr">
-              <a:buNone/>
-            </a:pPr>
-            <a:r>
-              <a:rPr lang="en-US" sz="1600" dirty="0">
-                <a:solidFill>
-                  <a:srgbClr val="2A7F85"/>
-                </a:solidFill>
-                <a:latin typeface="Calibri" pitchFamily="34" charset="0"/>
-                <a:ea typeface="Calibri" pitchFamily="34" charset="-122"/>
-                <a:cs typeface="Calibri" pitchFamily="34" charset="-120"/>
-              </a:rPr>
-              <a:t>→</a:t>
-            </a:r>
-            <a:endParaRPr lang="en-US" sz="1600" dirty="0"/>
-          </a:p>
-        </p:txBody>
-      </p:sp>
-      <p:sp>
-        <p:nvSpPr>
-          <p:cNvPr id="29" name="Shape 27"/>
-          <p:cNvSpPr/>
-          <p:nvPr/>
-        </p:nvSpPr>
-        <p:spPr>
-          <a:xfrm>
-            <a:off x="7214616" y="1261872"/>
-            <a:ext cx="1554480" cy="1572768"/>
-          </a:xfrm>
-          <a:prstGeom prst="rect">
-            <a:avLst/>
-          </a:prstGeom>
-          <a:solidFill>
-            <a:srgbClr val="E8F4F5"/>
-          </a:solidFill>
-          <a:ln w="12700">
-            <a:solidFill>
-              <a:srgbClr val="2A7F85"/>
-            </a:solidFill>
-            <a:prstDash val="solid"/>
-          </a:ln>
-        </p:spPr>
-        <p:txBody>
-          <a:bodyPr/>
-          <a:lstStyle/>
-          <a:p>
-            <a:endParaRPr lang="en-CA"/>
-          </a:p>
-        </p:txBody>
-      </p:sp>
-      <p:sp>
-        <p:nvSpPr>
-          <p:cNvPr id="30" name="Shape 28"/>
-          <p:cNvSpPr/>
-          <p:nvPr/>
-        </p:nvSpPr>
-        <p:spPr>
-          <a:xfrm>
-            <a:off x="7790688" y="1353312"/>
-            <a:ext cx="420624" cy="420624"/>
-          </a:xfrm>
-          <a:prstGeom prst="line">
-            <a:avLst/>
-          </a:prstGeom>
-          <a:solidFill>
-            <a:srgbClr val="2A7F85"/>
-          </a:solidFill>
-          <a:ln w="12700">
-            <a:solidFill>
-              <a:srgbClr val="2A7F85"/>
-            </a:solidFill>
-            <a:prstDash val="solid"/>
-          </a:ln>
-        </p:spPr>
-        <p:txBody>
-          <a:bodyPr/>
-          <a:lstStyle/>
-          <a:p>
-            <a:endParaRPr lang="en-CA"/>
-          </a:p>
-        </p:txBody>
-      </p:sp>
-      <p:sp>
-        <p:nvSpPr>
-          <p:cNvPr id="31" name="Text 29"/>
-          <p:cNvSpPr/>
-          <p:nvPr/>
-        </p:nvSpPr>
-        <p:spPr>
-          <a:xfrm>
-            <a:off x="7790688" y="1353312"/>
-            <a:ext cx="420624" cy="420624"/>
-          </a:xfrm>
-          <a:prstGeom prst="rect">
-            <a:avLst/>
-          </a:prstGeom>
-          <a:noFill/>
-          <a:ln/>
-        </p:spPr>
-        <p:txBody>
-          <a:bodyPr wrap="square" lIns="0" tIns="0" rIns="0" bIns="0" rtlCol="0" anchor="ctr"/>
-          <a:lstStyle/>
-          <a:p>
-            <a:pPr marL="0" indent="0" algn="ctr">
-              <a:buNone/>
-            </a:pPr>
-            <a:r>
-              <a:rPr lang="en-US" sz="2000" b="1" dirty="0">
-                <a:latin typeface="Calibri" pitchFamily="34" charset="0"/>
-                <a:ea typeface="Calibri" pitchFamily="34" charset="-122"/>
-                <a:cs typeface="Calibri" pitchFamily="34" charset="-120"/>
-              </a:rPr>
-              <a:t>5</a:t>
-            </a:r>
-            <a:endParaRPr lang="en-US" sz="2000" dirty="0"/>
-          </a:p>
-        </p:txBody>
-      </p:sp>
-      <p:sp>
-        <p:nvSpPr>
-          <p:cNvPr id="32" name="Text 30"/>
-          <p:cNvSpPr/>
-          <p:nvPr/>
-        </p:nvSpPr>
-        <p:spPr>
-          <a:xfrm>
-            <a:off x="7214616" y="1847088"/>
-            <a:ext cx="1554480" cy="457200"/>
-          </a:xfrm>
-          <a:prstGeom prst="rect">
-            <a:avLst/>
-          </a:prstGeom>
-          <a:noFill/>
-          <a:ln/>
-        </p:spPr>
-        <p:txBody>
-          <a:bodyPr wrap="square" lIns="0" tIns="0" rIns="0" bIns="0" rtlCol="0" anchor="ctr"/>
-          <a:lstStyle/>
-          <a:p>
-            <a:pPr marL="0" indent="0" algn="ctr">
-              <a:buNone/>
-            </a:pPr>
-            <a:r>
-              <a:rPr lang="en-US" sz="1300" b="1" dirty="0">
-                <a:solidFill>
-                  <a:srgbClr val="2A7F85"/>
-                </a:solidFill>
-                <a:latin typeface="Calibri" pitchFamily="34" charset="0"/>
-                <a:ea typeface="Calibri" pitchFamily="34" charset="-122"/>
-                <a:cs typeface="Calibri" pitchFamily="34" charset="-120"/>
-              </a:rPr>
-              <a:t>Tour &amp;</a:t>
-            </a:r>
-            <a:endParaRPr lang="en-US" sz="1300" dirty="0"/>
-          </a:p>
-          <a:p>
-            <a:pPr marL="0" indent="0" algn="ctr">
-              <a:buNone/>
-            </a:pPr>
-            <a:r>
-              <a:rPr lang="en-US" sz="1300" b="1" dirty="0">
-                <a:solidFill>
-                  <a:srgbClr val="2A7F85"/>
-                </a:solidFill>
-                <a:latin typeface="Calibri" pitchFamily="34" charset="0"/>
-                <a:ea typeface="Calibri" pitchFamily="34" charset="-122"/>
-                <a:cs typeface="Calibri" pitchFamily="34" charset="-120"/>
-              </a:rPr>
-              <a:t>Review</a:t>
-            </a:r>
-            <a:endParaRPr lang="en-US" sz="1300" dirty="0"/>
-          </a:p>
-        </p:txBody>
-      </p:sp>
-      <p:sp>
-        <p:nvSpPr>
-          <p:cNvPr id="33" name="Text 31"/>
-          <p:cNvSpPr/>
-          <p:nvPr/>
-        </p:nvSpPr>
-        <p:spPr>
-          <a:xfrm>
-            <a:off x="7287768" y="2322576"/>
-            <a:ext cx="1408176" cy="457200"/>
-          </a:xfrm>
-          <a:prstGeom prst="rect">
-            <a:avLst/>
-          </a:prstGeom>
-          <a:noFill/>
-          <a:ln/>
-        </p:spPr>
-        <p:txBody>
-          <a:bodyPr wrap="square" lIns="0" tIns="0" rIns="0" bIns="0" rtlCol="0" anchor="ctr"/>
-          <a:lstStyle/>
-          <a:p>
-            <a:pPr marL="0" indent="0" algn="ctr">
-              <a:buNone/>
-            </a:pPr>
-            <a:r>
-              <a:rPr lang="en-US" sz="1100" dirty="0">
-                <a:solidFill>
-                  <a:srgbClr val="4A5568"/>
-                </a:solidFill>
-                <a:latin typeface="Calibri" pitchFamily="34" charset="0"/>
-                <a:ea typeface="Calibri" pitchFamily="34" charset="-122"/>
-                <a:cs typeface="Calibri" pitchFamily="34" charset="-120"/>
-              </a:rPr>
-              <a:t>Tourist submits</a:t>
-            </a:r>
-            <a:endParaRPr lang="en-US" sz="1100" dirty="0"/>
-          </a:p>
-          <a:p>
-            <a:pPr marL="0" indent="0" algn="ctr">
-              <a:buNone/>
-            </a:pPr>
-            <a:r>
-              <a:rPr lang="en-US" sz="1100" dirty="0">
-                <a:solidFill>
-                  <a:srgbClr val="4A5568"/>
-                </a:solidFill>
-                <a:latin typeface="Calibri" pitchFamily="34" charset="0"/>
-                <a:ea typeface="Calibri" pitchFamily="34" charset="-122"/>
-                <a:cs typeface="Calibri" pitchFamily="34" charset="-120"/>
-              </a:rPr>
-              <a:t>5-star review</a:t>
+              <a:t>CONFIRMED</a:t>
             </a:r>
             <a:endParaRPr lang="en-US" sz="1100" dirty="0"/>
           </a:p>
@@ -24317,6 +24291,275 @@
               </a:rPr>
               <a:t>payment layer is already Stripe-ready.</a:t>
             </a:r>
+          </a:p>
+        </p:txBody>
+      </p:sp>
+      <p:sp>
+        <p:nvSpPr>
+          <p:cNvPr id="59" name="Text 26">
+            <a:extLst>
+              <a:ext uri="{FF2B5EF4-FFF2-40B4-BE49-F238E27FC236}">
+                <a16:creationId xmlns:a16="http://schemas.microsoft.com/office/drawing/2014/main" id="{AC96BBE7-AF2D-8153-7EAC-F87E392B03BB}"/>
+              </a:ext>
+            </a:extLst>
+          </p:cNvPr>
+          <p:cNvSpPr/>
+          <p:nvPr/>
+        </p:nvSpPr>
+        <p:spPr>
+          <a:xfrm>
+            <a:off x="7209506" y="1905179"/>
+            <a:ext cx="146304" cy="329184"/>
+          </a:xfrm>
+          <a:prstGeom prst="rect">
+            <a:avLst/>
+          </a:prstGeom>
+          <a:noFill/>
+          <a:ln/>
+        </p:spPr>
+        <p:txBody>
+          <a:bodyPr wrap="square" lIns="0" tIns="0" rIns="0" bIns="0" rtlCol="0" anchor="ctr"/>
+          <a:lstStyle/>
+          <a:p>
+            <a:pPr marL="0" indent="0" algn="ctr">
+              <a:buNone/>
+            </a:pPr>
+            <a:r>
+              <a:rPr lang="en-US" sz="1600" dirty="0">
+                <a:solidFill>
+                  <a:srgbClr val="2A7F85"/>
+                </a:solidFill>
+                <a:latin typeface="Calibri" pitchFamily="34" charset="0"/>
+                <a:ea typeface="Calibri" pitchFamily="34" charset="-122"/>
+                <a:cs typeface="Calibri" pitchFamily="34" charset="-120"/>
+              </a:rPr>
+              <a:t>→</a:t>
+            </a:r>
+            <a:endParaRPr lang="en-US" sz="1600" dirty="0"/>
+          </a:p>
+        </p:txBody>
+      </p:sp>
+      <p:sp>
+        <p:nvSpPr>
+          <p:cNvPr id="60" name="Shape 27">
+            <a:extLst>
+              <a:ext uri="{FF2B5EF4-FFF2-40B4-BE49-F238E27FC236}">
+                <a16:creationId xmlns:a16="http://schemas.microsoft.com/office/drawing/2014/main" id="{B1ECC2E3-E6B1-A076-CA46-3E4C004AA52D}"/>
+              </a:ext>
+            </a:extLst>
+          </p:cNvPr>
+          <p:cNvSpPr/>
+          <p:nvPr/>
+        </p:nvSpPr>
+        <p:spPr>
+          <a:xfrm>
+            <a:off x="7469037" y="1264077"/>
+            <a:ext cx="1105200" cy="1572768"/>
+          </a:xfrm>
+          <a:prstGeom prst="rect">
+            <a:avLst/>
+          </a:prstGeom>
+          <a:solidFill>
+            <a:srgbClr val="E8F4F5"/>
+          </a:solidFill>
+          <a:ln w="12700">
+            <a:solidFill>
+              <a:srgbClr val="2A7F85"/>
+            </a:solidFill>
+            <a:prstDash val="solid"/>
+          </a:ln>
+        </p:spPr>
+        <p:txBody>
+          <a:bodyPr/>
+          <a:lstStyle/>
+          <a:p>
+            <a:endParaRPr lang="en-CA"/>
+          </a:p>
+        </p:txBody>
+      </p:sp>
+      <p:sp>
+        <p:nvSpPr>
+          <p:cNvPr id="61" name="Shape 28">
+            <a:extLst>
+              <a:ext uri="{FF2B5EF4-FFF2-40B4-BE49-F238E27FC236}">
+                <a16:creationId xmlns:a16="http://schemas.microsoft.com/office/drawing/2014/main" id="{E9E903D1-E067-2CEB-FFDB-7745AA28860A}"/>
+              </a:ext>
+            </a:extLst>
+          </p:cNvPr>
+          <p:cNvSpPr/>
+          <p:nvPr/>
+        </p:nvSpPr>
+        <p:spPr>
+          <a:xfrm>
+            <a:off x="7827607" y="1342763"/>
+            <a:ext cx="420624" cy="420624"/>
+          </a:xfrm>
+          <a:prstGeom prst="line">
+            <a:avLst/>
+          </a:prstGeom>
+          <a:solidFill>
+            <a:srgbClr val="2A7F85"/>
+          </a:solidFill>
+          <a:ln w="12700">
+            <a:solidFill>
+              <a:srgbClr val="2A7F85"/>
+            </a:solidFill>
+            <a:prstDash val="solid"/>
+          </a:ln>
+        </p:spPr>
+        <p:txBody>
+          <a:bodyPr/>
+          <a:lstStyle/>
+          <a:p>
+            <a:endParaRPr lang="en-CA"/>
+          </a:p>
+        </p:txBody>
+      </p:sp>
+      <p:sp>
+        <p:nvSpPr>
+          <p:cNvPr id="62" name="Text 29">
+            <a:extLst>
+              <a:ext uri="{FF2B5EF4-FFF2-40B4-BE49-F238E27FC236}">
+                <a16:creationId xmlns:a16="http://schemas.microsoft.com/office/drawing/2014/main" id="{08BF44CD-6C3E-D5E3-C0C9-81D4FD6752B8}"/>
+              </a:ext>
+            </a:extLst>
+          </p:cNvPr>
+          <p:cNvSpPr/>
+          <p:nvPr/>
+        </p:nvSpPr>
+        <p:spPr>
+          <a:xfrm>
+            <a:off x="7827607" y="1350650"/>
+            <a:ext cx="420624" cy="420624"/>
+          </a:xfrm>
+          <a:prstGeom prst="rect">
+            <a:avLst/>
+          </a:prstGeom>
+          <a:noFill/>
+          <a:ln/>
+        </p:spPr>
+        <p:txBody>
+          <a:bodyPr wrap="square" lIns="0" tIns="0" rIns="0" bIns="0" rtlCol="0" anchor="ctr"/>
+          <a:lstStyle/>
+          <a:p>
+            <a:pPr marL="0" indent="0" algn="ctr">
+              <a:buNone/>
+            </a:pPr>
+            <a:r>
+              <a:rPr lang="en-US" sz="2000" b="1" dirty="0">
+                <a:latin typeface="Calibri" pitchFamily="34" charset="0"/>
+                <a:ea typeface="Calibri" pitchFamily="34" charset="-122"/>
+                <a:cs typeface="Calibri" pitchFamily="34" charset="-120"/>
+              </a:rPr>
+              <a:t>6</a:t>
+            </a:r>
+            <a:endParaRPr lang="en-US" sz="2000" dirty="0"/>
+          </a:p>
+        </p:txBody>
+      </p:sp>
+      <p:sp>
+        <p:nvSpPr>
+          <p:cNvPr id="63" name="Text 30">
+            <a:extLst>
+              <a:ext uri="{FF2B5EF4-FFF2-40B4-BE49-F238E27FC236}">
+                <a16:creationId xmlns:a16="http://schemas.microsoft.com/office/drawing/2014/main" id="{0121306D-AB12-F305-3357-12734D0EDE78}"/>
+              </a:ext>
+            </a:extLst>
+          </p:cNvPr>
+          <p:cNvSpPr/>
+          <p:nvPr/>
+        </p:nvSpPr>
+        <p:spPr>
+          <a:xfrm>
+            <a:off x="7250221" y="1830409"/>
+            <a:ext cx="1554480" cy="457200"/>
+          </a:xfrm>
+          <a:prstGeom prst="rect">
+            <a:avLst/>
+          </a:prstGeom>
+          <a:noFill/>
+          <a:ln/>
+        </p:spPr>
+        <p:txBody>
+          <a:bodyPr wrap="square" lIns="0" tIns="0" rIns="0" bIns="0" rtlCol="0" anchor="ctr"/>
+          <a:lstStyle/>
+          <a:p>
+            <a:pPr marL="0" indent="0" algn="ctr">
+              <a:buNone/>
+            </a:pPr>
+            <a:r>
+              <a:rPr lang="en-US" sz="1300" b="1" dirty="0">
+                <a:solidFill>
+                  <a:srgbClr val="2A7F85"/>
+                </a:solidFill>
+                <a:latin typeface="Calibri" pitchFamily="34" charset="0"/>
+                <a:ea typeface="Calibri" pitchFamily="34" charset="-122"/>
+                <a:cs typeface="Calibri" pitchFamily="34" charset="-120"/>
+              </a:rPr>
+              <a:t>Booking</a:t>
+            </a:r>
+          </a:p>
+          <a:p>
+            <a:pPr marL="0" indent="0" algn="ctr">
+              <a:buNone/>
+            </a:pPr>
+            <a:r>
+              <a:rPr lang="en-US" sz="1300" b="1" dirty="0">
+                <a:solidFill>
+                  <a:srgbClr val="2A7F85"/>
+                </a:solidFill>
+                <a:latin typeface="Calibri" pitchFamily="34" charset="0"/>
+                <a:ea typeface="Calibri" pitchFamily="34" charset="-122"/>
+                <a:cs typeface="Calibri" pitchFamily="34" charset="-120"/>
+              </a:rPr>
+              <a:t>Confirmed</a:t>
+            </a:r>
+            <a:endParaRPr lang="en-US" sz="1300" dirty="0"/>
+          </a:p>
+        </p:txBody>
+      </p:sp>
+      <p:sp>
+        <p:nvSpPr>
+          <p:cNvPr id="64" name="Text 31">
+            <a:extLst>
+              <a:ext uri="{FF2B5EF4-FFF2-40B4-BE49-F238E27FC236}">
+                <a16:creationId xmlns:a16="http://schemas.microsoft.com/office/drawing/2014/main" id="{38499EA6-98C8-6B73-03B6-C207B6D2609E}"/>
+              </a:ext>
+            </a:extLst>
+          </p:cNvPr>
+          <p:cNvSpPr/>
+          <p:nvPr/>
+        </p:nvSpPr>
+        <p:spPr>
+          <a:xfrm>
+            <a:off x="7333488" y="2312379"/>
+            <a:ext cx="1408176" cy="457200"/>
+          </a:xfrm>
+          <a:prstGeom prst="rect">
+            <a:avLst/>
+          </a:prstGeom>
+          <a:noFill/>
+          <a:ln/>
+        </p:spPr>
+        <p:txBody>
+          <a:bodyPr wrap="square" lIns="0" tIns="0" rIns="0" bIns="0" rtlCol="0" anchor="ctr"/>
+          <a:lstStyle/>
+          <a:p>
+            <a:pPr marL="0" indent="0" algn="ctr">
+              <a:buNone/>
+            </a:pPr>
+            <a:r>
+              <a:rPr lang="en-US" sz="1100" dirty="0">
+                <a:solidFill>
+                  <a:srgbClr val="4A5568"/>
+                </a:solidFill>
+                <a:latin typeface="Calibri" pitchFamily="34" charset="0"/>
+                <a:ea typeface="Calibri" pitchFamily="34" charset="-122"/>
+                <a:cs typeface="Calibri" pitchFamily="34" charset="-120"/>
+              </a:rPr>
+              <a:t>Ready for tour</a:t>
+            </a:r>
+            <a:endParaRPr lang="en-US" sz="1100" dirty="0"/>
           </a:p>
         </p:txBody>
       </p:sp>

--- a/docs/final/LocalGuide_Presentation.pptx
+++ b/docs/final/LocalGuide_Presentation.pptx
@@ -1605,7 +1605,7 @@
                 <a:ea typeface="Calibri" pitchFamily="34" charset="-122"/>
                 <a:cs typeface="Calibri" pitchFamily="34" charset="-120"/>
               </a:rPr>
-              <a:t>Spring 2026  ·  Douglas College  ·  CSIS 3275-003</a:t>
+              <a:t>Spring 2026  ·  Douglas College  ·  CSIS 3275-001</a:t>
             </a:r>
             <a:endParaRPr lang="en-US" sz="1300" dirty="0"/>
           </a:p>

--- a/docs/final/LocalGuide_Presentation.pptx
+++ b/docs/final/LocalGuide_Presentation.pptx
@@ -5,7 +5,7 @@
     <p:sldMasterId id="2147483648" r:id="rId1"/>
   </p:sldMasterIdLst>
   <p:notesMasterIdLst>
-    <p:notesMasterId r:id="rId20"/>
+    <p:notesMasterId r:id="rId22"/>
   </p:notesMasterIdLst>
   <p:sldIdLst>
     <p:sldId id="256" r:id="rId2"/>
@@ -26,6 +26,8 @@
     <p:sldId id="268" r:id="rId17"/>
     <p:sldId id="269" r:id="rId18"/>
     <p:sldId id="264" r:id="rId19"/>
+    <p:sldId id="275" r:id="rId20"/>
+    <p:sldId id="276" r:id="rId21"/>
   </p:sldIdLst>
   <p:sldSz cx="9144000" cy="5143500" type="screen16x9"/>
   <p:notesSz cx="5143500" cy="9144000"/>
@@ -740,6 +742,114 @@
 </p:notes>
 </file>
 
+<file path=ppt/notesSlides/notesSlide19.xml><?xml version="1.0" encoding="utf-8"?>
+<p:notes xmlns:a="http://schemas.openxmlformats.org/drawingml/2006/main" xmlns:r="http://schemas.openxmlformats.org/officeDocument/2006/relationships" xmlns:p="http://schemas.openxmlformats.org/presentationml/2006/main">
+  <p:cSld>
+    <p:spTree>
+      <p:nvGrpSpPr>
+        <p:cNvPr id="1" name="">
+          <a:extLst>
+            <a:ext uri="{FF2B5EF4-FFF2-40B4-BE49-F238E27FC236}">
+              <a16:creationId xmlns:a16="http://schemas.microsoft.com/office/drawing/2014/main" id="{DAE1D3A8-2EE2-6BF0-24D8-8FEA571E5329}"/>
+            </a:ext>
+          </a:extLst>
+        </p:cNvPr>
+        <p:cNvGrpSpPr/>
+        <p:nvPr/>
+      </p:nvGrpSpPr>
+      <p:grpSpPr>
+        <a:xfrm>
+          <a:off x="0" y="0"/>
+          <a:ext cx="0" cy="0"/>
+          <a:chOff x="0" y="0"/>
+          <a:chExt cx="0" cy="0"/>
+        </a:xfrm>
+      </p:grpSpPr>
+      <p:sp>
+        <p:nvSpPr>
+          <p:cNvPr id="2" name="Slide Image Placeholder 1">
+            <a:extLst>
+              <a:ext uri="{FF2B5EF4-FFF2-40B4-BE49-F238E27FC236}">
+                <a16:creationId xmlns:a16="http://schemas.microsoft.com/office/drawing/2014/main" id="{A7A17DDD-E197-A74D-2B06-564BE0A344C9}"/>
+              </a:ext>
+            </a:extLst>
+          </p:cNvPr>
+          <p:cNvSpPr>
+            <a:spLocks noGrp="1" noRot="1" noChangeAspect="1"/>
+          </p:cNvSpPr>
+          <p:nvPr>
+            <p:ph type="sldImg"/>
+          </p:nvPr>
+        </p:nvSpPr>
+        <p:spPr/>
+      </p:sp>
+      <p:sp>
+        <p:nvSpPr>
+          <p:cNvPr id="3" name="Notes Placeholder 2">
+            <a:extLst>
+              <a:ext uri="{FF2B5EF4-FFF2-40B4-BE49-F238E27FC236}">
+                <a16:creationId xmlns:a16="http://schemas.microsoft.com/office/drawing/2014/main" id="{F1AA0BD8-E713-0382-4D63-99870D2A33CF}"/>
+              </a:ext>
+            </a:extLst>
+          </p:cNvPr>
+          <p:cNvSpPr>
+            <a:spLocks noGrp="1"/>
+          </p:cNvSpPr>
+          <p:nvPr>
+            <p:ph type="body" idx="1"/>
+          </p:nvPr>
+        </p:nvSpPr>
+        <p:spPr/>
+        <p:txBody>
+          <a:bodyPr/>
+          <a:lstStyle/>
+          <a:p>
+            <a:endParaRPr lang="en-US" dirty="0"/>
+          </a:p>
+        </p:txBody>
+      </p:sp>
+      <p:sp>
+        <p:nvSpPr>
+          <p:cNvPr id="4" name="Slide Number Placeholder 3">
+            <a:extLst>
+              <a:ext uri="{FF2B5EF4-FFF2-40B4-BE49-F238E27FC236}">
+                <a16:creationId xmlns:a16="http://schemas.microsoft.com/office/drawing/2014/main" id="{04CD131F-A26D-2C3C-57E8-D2586523E5D0}"/>
+              </a:ext>
+            </a:extLst>
+          </p:cNvPr>
+          <p:cNvSpPr>
+            <a:spLocks noGrp="1"/>
+          </p:cNvSpPr>
+          <p:nvPr>
+            <p:ph type="sldNum" sz="quarter" idx="10"/>
+          </p:nvPr>
+        </p:nvSpPr>
+        <p:spPr/>
+        <p:txBody>
+          <a:bodyPr/>
+          <a:lstStyle/>
+          <a:p>
+            <a:fld id="{F7021451-1387-4CA6-816F-3879F97B5CBC}" type="slidenum">
+              <a:rPr lang="en-US"/>
+              <a:t>19</a:t>
+            </a:fld>
+            <a:endParaRPr lang="en-US"/>
+          </a:p>
+        </p:txBody>
+      </p:sp>
+    </p:spTree>
+    <p:extLst>
+      <p:ext uri="{BB962C8B-B14F-4D97-AF65-F5344CB8AC3E}">
+        <p14:creationId xmlns:p14="http://schemas.microsoft.com/office/powerpoint/2010/main" val="4120481963"/>
+      </p:ext>
+    </p:extLst>
+  </p:cSld>
+  <p:clrMapOvr>
+    <a:masterClrMapping/>
+  </p:clrMapOvr>
+</p:notes>
+</file>
+
 <file path=ppt/notesSlides/notesSlide2.xml><?xml version="1.0" encoding="utf-8"?>
 <p:notes xmlns:a="http://schemas.openxmlformats.org/drawingml/2006/main" xmlns:r="http://schemas.openxmlformats.org/officeDocument/2006/relationships" xmlns:p="http://schemas.openxmlformats.org/presentationml/2006/main">
   <p:cSld>
@@ -815,6 +925,114 @@
     <p:extLst>
       <p:ext uri="{BB962C8B-B14F-4D97-AF65-F5344CB8AC3E}">
         <p14:creationId xmlns:p14="http://schemas.microsoft.com/office/powerpoint/2010/main" val="1024086991"/>
+      </p:ext>
+    </p:extLst>
+  </p:cSld>
+  <p:clrMapOvr>
+    <a:masterClrMapping/>
+  </p:clrMapOvr>
+</p:notes>
+</file>
+
+<file path=ppt/notesSlides/notesSlide20.xml><?xml version="1.0" encoding="utf-8"?>
+<p:notes xmlns:a="http://schemas.openxmlformats.org/drawingml/2006/main" xmlns:r="http://schemas.openxmlformats.org/officeDocument/2006/relationships" xmlns:p="http://schemas.openxmlformats.org/presentationml/2006/main">
+  <p:cSld>
+    <p:spTree>
+      <p:nvGrpSpPr>
+        <p:cNvPr id="1" name="">
+          <a:extLst>
+            <a:ext uri="{FF2B5EF4-FFF2-40B4-BE49-F238E27FC236}">
+              <a16:creationId xmlns:a16="http://schemas.microsoft.com/office/drawing/2014/main" id="{4517302D-2CBD-926C-4CE8-1D60D3C9D907}"/>
+            </a:ext>
+          </a:extLst>
+        </p:cNvPr>
+        <p:cNvGrpSpPr/>
+        <p:nvPr/>
+      </p:nvGrpSpPr>
+      <p:grpSpPr>
+        <a:xfrm>
+          <a:off x="0" y="0"/>
+          <a:ext cx="0" cy="0"/>
+          <a:chOff x="0" y="0"/>
+          <a:chExt cx="0" cy="0"/>
+        </a:xfrm>
+      </p:grpSpPr>
+      <p:sp>
+        <p:nvSpPr>
+          <p:cNvPr id="2" name="Slide Image Placeholder 1">
+            <a:extLst>
+              <a:ext uri="{FF2B5EF4-FFF2-40B4-BE49-F238E27FC236}">
+                <a16:creationId xmlns:a16="http://schemas.microsoft.com/office/drawing/2014/main" id="{949FA62C-C72D-1B50-32BD-15721EB41519}"/>
+              </a:ext>
+            </a:extLst>
+          </p:cNvPr>
+          <p:cNvSpPr>
+            <a:spLocks noGrp="1" noRot="1" noChangeAspect="1"/>
+          </p:cNvSpPr>
+          <p:nvPr>
+            <p:ph type="sldImg"/>
+          </p:nvPr>
+        </p:nvSpPr>
+        <p:spPr/>
+      </p:sp>
+      <p:sp>
+        <p:nvSpPr>
+          <p:cNvPr id="3" name="Notes Placeholder 2">
+            <a:extLst>
+              <a:ext uri="{FF2B5EF4-FFF2-40B4-BE49-F238E27FC236}">
+                <a16:creationId xmlns:a16="http://schemas.microsoft.com/office/drawing/2014/main" id="{2C6585B0-AA6B-F0BA-663A-4953740B8CB9}"/>
+              </a:ext>
+            </a:extLst>
+          </p:cNvPr>
+          <p:cNvSpPr>
+            <a:spLocks noGrp="1"/>
+          </p:cNvSpPr>
+          <p:nvPr>
+            <p:ph type="body" idx="1"/>
+          </p:nvPr>
+        </p:nvSpPr>
+        <p:spPr/>
+        <p:txBody>
+          <a:bodyPr/>
+          <a:lstStyle/>
+          <a:p>
+            <a:endParaRPr lang="en-US" dirty="0"/>
+          </a:p>
+        </p:txBody>
+      </p:sp>
+      <p:sp>
+        <p:nvSpPr>
+          <p:cNvPr id="4" name="Slide Number Placeholder 3">
+            <a:extLst>
+              <a:ext uri="{FF2B5EF4-FFF2-40B4-BE49-F238E27FC236}">
+                <a16:creationId xmlns:a16="http://schemas.microsoft.com/office/drawing/2014/main" id="{DC694D47-ABA5-A3A5-3495-DBDE1235C7D6}"/>
+              </a:ext>
+            </a:extLst>
+          </p:cNvPr>
+          <p:cNvSpPr>
+            <a:spLocks noGrp="1"/>
+          </p:cNvSpPr>
+          <p:nvPr>
+            <p:ph type="sldNum" sz="quarter" idx="10"/>
+          </p:nvPr>
+        </p:nvSpPr>
+        <p:spPr/>
+        <p:txBody>
+          <a:bodyPr/>
+          <a:lstStyle/>
+          <a:p>
+            <a:fld id="{F7021451-1387-4CA6-816F-3879F97B5CBC}" type="slidenum">
+              <a:rPr lang="en-US"/>
+              <a:t>20</a:t>
+            </a:fld>
+            <a:endParaRPr lang="en-US"/>
+          </a:p>
+        </p:txBody>
+      </p:sp>
+    </p:spTree>
+    <p:extLst>
+      <p:ext uri="{BB962C8B-B14F-4D97-AF65-F5344CB8AC3E}">
+        <p14:creationId xmlns:p14="http://schemas.microsoft.com/office/powerpoint/2010/main" val="3007138878"/>
       </p:ext>
     </p:extLst>
   </p:cSld>
@@ -11187,6 +11405,140 @@
 </p:sld>
 </file>
 
+<file path=ppt/slides/slide19.xml><?xml version="1.0" encoding="utf-8"?>
+<p:sld xmlns:a="http://schemas.openxmlformats.org/drawingml/2006/main" xmlns:r="http://schemas.openxmlformats.org/officeDocument/2006/relationships" xmlns:p="http://schemas.openxmlformats.org/presentationml/2006/main">
+  <p:cSld>
+    <p:spTree>
+      <p:nvGrpSpPr>
+        <p:cNvPr id="1" name="">
+          <a:extLst>
+            <a:ext uri="{FF2B5EF4-FFF2-40B4-BE49-F238E27FC236}">
+              <a16:creationId xmlns:a16="http://schemas.microsoft.com/office/drawing/2014/main" id="{F422976E-C90E-1EE0-352E-EB878AE68326}"/>
+            </a:ext>
+          </a:extLst>
+        </p:cNvPr>
+        <p:cNvGrpSpPr/>
+        <p:nvPr/>
+      </p:nvGrpSpPr>
+      <p:grpSpPr>
+        <a:xfrm>
+          <a:off x="0" y="0"/>
+          <a:ext cx="0" cy="0"/>
+          <a:chOff x="0" y="0"/>
+          <a:chExt cx="0" cy="0"/>
+        </a:xfrm>
+      </p:grpSpPr>
+      <p:sp>
+        <p:nvSpPr>
+          <p:cNvPr id="38" name="Rectangle 37">
+            <a:extLst>
+              <a:ext uri="{FF2B5EF4-FFF2-40B4-BE49-F238E27FC236}">
+                <a16:creationId xmlns:a16="http://schemas.microsoft.com/office/drawing/2014/main" id="{A011CD97-6CE9-48C3-E0BD-4B48F3392C71}"/>
+              </a:ext>
+            </a:extLst>
+          </p:cNvPr>
+          <p:cNvSpPr/>
+          <p:nvPr/>
+        </p:nvSpPr>
+        <p:spPr>
+          <a:xfrm>
+            <a:off x="0" y="0"/>
+            <a:ext cx="9144000" cy="5143500"/>
+          </a:xfrm>
+          <a:prstGeom prst="rect">
+            <a:avLst/>
+          </a:prstGeom>
+          <a:solidFill>
+            <a:srgbClr val="2A7F85"/>
+          </a:solidFill>
+        </p:spPr>
+        <p:style>
+          <a:lnRef idx="2">
+            <a:schemeClr val="accent1">
+              <a:shade val="15000"/>
+            </a:schemeClr>
+          </a:lnRef>
+          <a:fillRef idx="1">
+            <a:schemeClr val="accent1"/>
+          </a:fillRef>
+          <a:effectRef idx="0">
+            <a:schemeClr val="accent1"/>
+          </a:effectRef>
+          <a:fontRef idx="minor">
+            <a:schemeClr val="lt1"/>
+          </a:fontRef>
+        </p:style>
+        <p:txBody>
+          <a:bodyPr rtlCol="0" anchor="ctr"/>
+          <a:lstStyle/>
+          <a:p>
+            <a:pPr algn="ctr"/>
+            <a:endParaRPr lang="en-CA"/>
+          </a:p>
+        </p:txBody>
+      </p:sp>
+      <p:sp>
+        <p:nvSpPr>
+          <p:cNvPr id="2" name="Text 0">
+            <a:extLst>
+              <a:ext uri="{FF2B5EF4-FFF2-40B4-BE49-F238E27FC236}">
+                <a16:creationId xmlns:a16="http://schemas.microsoft.com/office/drawing/2014/main" id="{79BCB291-3986-D05B-39F3-D3FF0D3BE4BA}"/>
+              </a:ext>
+            </a:extLst>
+          </p:cNvPr>
+          <p:cNvSpPr/>
+          <p:nvPr/>
+        </p:nvSpPr>
+        <p:spPr>
+          <a:xfrm>
+            <a:off x="1135161" y="2315391"/>
+            <a:ext cx="7512450" cy="548640"/>
+          </a:xfrm>
+          <a:prstGeom prst="rect">
+            <a:avLst/>
+          </a:prstGeom>
+          <a:noFill/>
+          <a:ln/>
+        </p:spPr>
+        <p:txBody>
+          <a:bodyPr wrap="square" lIns="0" tIns="0" rIns="0" bIns="0" rtlCol="0" anchor="ctr"/>
+          <a:lstStyle/>
+          <a:p>
+            <a:pPr marL="0" indent="0">
+              <a:buNone/>
+            </a:pPr>
+            <a:r>
+              <a:rPr lang="en-US" sz="4400" b="1" dirty="0">
+                <a:solidFill>
+                  <a:schemeClr val="bg1"/>
+                </a:solidFill>
+                <a:latin typeface="Calibri" pitchFamily="34" charset="0"/>
+                <a:ea typeface="Calibri" pitchFamily="34" charset="-122"/>
+                <a:cs typeface="Calibri" pitchFamily="34" charset="-120"/>
+              </a:rPr>
+              <a:t>Let’s do the web presentation!!</a:t>
+            </a:r>
+            <a:endParaRPr lang="en-US" sz="4400" dirty="0">
+              <a:solidFill>
+                <a:schemeClr val="bg1"/>
+              </a:solidFill>
+            </a:endParaRPr>
+          </a:p>
+        </p:txBody>
+      </p:sp>
+    </p:spTree>
+    <p:extLst>
+      <p:ext uri="{BB962C8B-B14F-4D97-AF65-F5344CB8AC3E}">
+        <p14:creationId xmlns:p14="http://schemas.microsoft.com/office/powerpoint/2010/main" val="314740862"/>
+      </p:ext>
+    </p:extLst>
+  </p:cSld>
+  <p:clrMapOvr>
+    <a:masterClrMapping/>
+  </p:clrMapOvr>
+</p:sld>
+</file>
+
 <file path=ppt/slides/slide2.xml><?xml version="1.0" encoding="utf-8"?>
 <p:sld xmlns:a="http://schemas.openxmlformats.org/drawingml/2006/main" xmlns:r="http://schemas.openxmlformats.org/officeDocument/2006/relationships" xmlns:p="http://schemas.openxmlformats.org/presentationml/2006/main">
   <p:cSld name="Slide 2">
@@ -12501,6 +12853,164 @@
         </p:txBody>
       </p:sp>
     </p:spTree>
+  </p:cSld>
+  <p:clrMapOvr>
+    <a:masterClrMapping/>
+  </p:clrMapOvr>
+</p:sld>
+</file>
+
+<file path=ppt/slides/slide20.xml><?xml version="1.0" encoding="utf-8"?>
+<p:sld xmlns:a="http://schemas.openxmlformats.org/drawingml/2006/main" xmlns:r="http://schemas.openxmlformats.org/officeDocument/2006/relationships" xmlns:p="http://schemas.openxmlformats.org/presentationml/2006/main">
+  <p:cSld>
+    <p:spTree>
+      <p:nvGrpSpPr>
+        <p:cNvPr id="1" name="">
+          <a:extLst>
+            <a:ext uri="{FF2B5EF4-FFF2-40B4-BE49-F238E27FC236}">
+              <a16:creationId xmlns:a16="http://schemas.microsoft.com/office/drawing/2014/main" id="{5F9AA518-D482-769E-FE2B-2E82D56639BA}"/>
+            </a:ext>
+          </a:extLst>
+        </p:cNvPr>
+        <p:cNvGrpSpPr/>
+        <p:nvPr/>
+      </p:nvGrpSpPr>
+      <p:grpSpPr>
+        <a:xfrm>
+          <a:off x="0" y="0"/>
+          <a:ext cx="0" cy="0"/>
+          <a:chOff x="0" y="0"/>
+          <a:chExt cx="0" cy="0"/>
+        </a:xfrm>
+      </p:grpSpPr>
+      <p:sp>
+        <p:nvSpPr>
+          <p:cNvPr id="38" name="Rectangle 37">
+            <a:extLst>
+              <a:ext uri="{FF2B5EF4-FFF2-40B4-BE49-F238E27FC236}">
+                <a16:creationId xmlns:a16="http://schemas.microsoft.com/office/drawing/2014/main" id="{F47E9BD2-E6B8-75F3-833B-F6839DD36B48}"/>
+              </a:ext>
+            </a:extLst>
+          </p:cNvPr>
+          <p:cNvSpPr/>
+          <p:nvPr/>
+        </p:nvSpPr>
+        <p:spPr>
+          <a:xfrm>
+            <a:off x="0" y="0"/>
+            <a:ext cx="9144000" cy="5143500"/>
+          </a:xfrm>
+          <a:prstGeom prst="rect">
+            <a:avLst/>
+          </a:prstGeom>
+          <a:solidFill>
+            <a:srgbClr val="2A7F85"/>
+          </a:solidFill>
+        </p:spPr>
+        <p:style>
+          <a:lnRef idx="2">
+            <a:schemeClr val="accent1">
+              <a:shade val="15000"/>
+            </a:schemeClr>
+          </a:lnRef>
+          <a:fillRef idx="1">
+            <a:schemeClr val="accent1"/>
+          </a:fillRef>
+          <a:effectRef idx="0">
+            <a:schemeClr val="accent1"/>
+          </a:effectRef>
+          <a:fontRef idx="minor">
+            <a:schemeClr val="lt1"/>
+          </a:fontRef>
+        </p:style>
+        <p:txBody>
+          <a:bodyPr rtlCol="0" anchor="ctr"/>
+          <a:lstStyle/>
+          <a:p>
+            <a:pPr algn="ctr"/>
+            <a:endParaRPr lang="en-CA"/>
+          </a:p>
+        </p:txBody>
+      </p:sp>
+      <p:sp>
+        <p:nvSpPr>
+          <p:cNvPr id="2" name="Text 0">
+            <a:extLst>
+              <a:ext uri="{FF2B5EF4-FFF2-40B4-BE49-F238E27FC236}">
+                <a16:creationId xmlns:a16="http://schemas.microsoft.com/office/drawing/2014/main" id="{814CA6E1-548F-3E81-E30C-167FA92BE252}"/>
+              </a:ext>
+            </a:extLst>
+          </p:cNvPr>
+          <p:cNvSpPr/>
+          <p:nvPr/>
+        </p:nvSpPr>
+        <p:spPr>
+          <a:xfrm>
+            <a:off x="1239665" y="2297430"/>
+            <a:ext cx="6780930" cy="548640"/>
+          </a:xfrm>
+          <a:prstGeom prst="rect">
+            <a:avLst/>
+          </a:prstGeom>
+          <a:noFill/>
+          <a:ln/>
+        </p:spPr>
+        <p:txBody>
+          <a:bodyPr wrap="square" lIns="0" tIns="0" rIns="0" bIns="0" rtlCol="0" anchor="ctr"/>
+          <a:lstStyle/>
+          <a:p>
+            <a:pPr marL="0" indent="0" algn="ctr">
+              <a:buNone/>
+            </a:pPr>
+            <a:r>
+              <a:rPr lang="en-US" sz="7200" b="1" dirty="0">
+                <a:solidFill>
+                  <a:schemeClr val="bg1"/>
+                </a:solidFill>
+                <a:latin typeface="Calibri" pitchFamily="34" charset="0"/>
+                <a:ea typeface="Calibri" pitchFamily="34" charset="-122"/>
+                <a:cs typeface="Calibri" pitchFamily="34" charset="-120"/>
+              </a:rPr>
+              <a:t>Thank you!</a:t>
+            </a:r>
+            <a:endParaRPr lang="en-US" sz="6000" b="1" dirty="0">
+              <a:solidFill>
+                <a:schemeClr val="bg1"/>
+              </a:solidFill>
+              <a:latin typeface="Calibri" pitchFamily="34" charset="0"/>
+              <a:ea typeface="Calibri" pitchFamily="34" charset="-122"/>
+              <a:cs typeface="Calibri" pitchFamily="34" charset="-120"/>
+            </a:endParaRPr>
+          </a:p>
+          <a:p>
+            <a:pPr marL="0" indent="0" algn="ctr">
+              <a:buNone/>
+            </a:pPr>
+            <a:r>
+              <a:rPr lang="en-US" sz="4400" b="1" dirty="0">
+                <a:solidFill>
+                  <a:schemeClr val="bg1"/>
+                </a:solidFill>
+                <a:latin typeface="Calibri" pitchFamily="34" charset="0"/>
+                <a:ea typeface="Calibri" pitchFamily="34" charset="-122"/>
+                <a:cs typeface="Calibri" pitchFamily="34" charset="-120"/>
+              </a:rPr>
+              <a:t>-Question time</a:t>
+            </a:r>
+            <a:endParaRPr lang="en-US" sz="4400" dirty="0">
+              <a:solidFill>
+                <a:schemeClr val="bg1"/>
+              </a:solidFill>
+            </a:endParaRPr>
+          </a:p>
+        </p:txBody>
+      </p:sp>
+    </p:spTree>
+    <p:extLst>
+      <p:ext uri="{BB962C8B-B14F-4D97-AF65-F5344CB8AC3E}">
+        <p14:creationId xmlns:p14="http://schemas.microsoft.com/office/powerpoint/2010/main" val="3545006552"/>
+      </p:ext>
+    </p:extLst>
   </p:cSld>
   <p:clrMapOvr>
     <a:masterClrMapping/>
